--- a/slides/CLD-Workshop-Amazon-OpenSearch.pptx
+++ b/slides/CLD-Workshop-Amazon-OpenSearch.pptx
@@ -3291,7 +3291,7 @@
         </p:nvSpPr>
         <p:spPr>
           <a:xfrm>
-            <a:off x="566927" y="602433"/>
+            <a:off x="396240" y="587028"/>
             <a:ext cx="2126845" cy="221599"/>
           </a:xfrm>
           <a:prstGeom prst="rect">
@@ -3464,6 +3464,15 @@
               </a:rPr>
               <a:t>suisse</a:t>
             </a:r>
+            <a:r>
+              <a:rPr lang="fr-CH" b="0" dirty="0">
+                <a:solidFill>
+                  <a:srgbClr val="555F70"/>
+                </a:solidFill>
+                <a:latin typeface="Aptos"/>
+              </a:rPr>
+              <a:t>.</a:t>
+            </a:r>
             <a:endParaRPr b="0" dirty="0">
               <a:solidFill>
                 <a:srgbClr val="555F70"/>
@@ -3482,7 +3491,7 @@
         <p:spPr>
           <a:xfrm>
             <a:off x="621792" y="5239512"/>
-            <a:ext cx="5349240" cy="221599"/>
+            <a:ext cx="5349240" cy="252377"/>
           </a:xfrm>
           <a:prstGeom prst="rect">
             <a:avLst/>
@@ -3497,7 +3506,7 @@
           <a:p>
             <a:pPr algn="l"/>
             <a:r>
-              <a:rPr sz="1200" b="0" dirty="0" err="1">
+              <a:rPr sz="1400" b="1" dirty="0" err="1">
                 <a:solidFill>
                   <a:srgbClr val="555F70"/>
                 </a:solidFill>
@@ -3506,7 +3515,7 @@
               <a:t>Koray</a:t>
             </a:r>
             <a:r>
-              <a:rPr sz="1200" b="0" dirty="0">
+              <a:rPr sz="1400" b="1" dirty="0">
                 <a:solidFill>
                   <a:srgbClr val="555F70"/>
                 </a:solidFill>
@@ -3515,7 +3524,7 @@
               <a:t> </a:t>
             </a:r>
             <a:r>
-              <a:rPr sz="1200" b="0" dirty="0" err="1">
+              <a:rPr sz="1400" b="1" dirty="0" err="1">
                 <a:solidFill>
                   <a:srgbClr val="555F70"/>
                 </a:solidFill>
@@ -3524,7 +3533,7 @@
               <a:t>Akgül</a:t>
             </a:r>
             <a:r>
-              <a:rPr sz="1200" b="0" dirty="0">
+              <a:rPr sz="1400" b="1" dirty="0">
                 <a:solidFill>
                   <a:srgbClr val="555F70"/>
                 </a:solidFill>
@@ -3533,7 +3542,7 @@
               <a:t>, Nathan </a:t>
             </a:r>
             <a:r>
-              <a:rPr sz="1200" b="0" dirty="0" err="1">
+              <a:rPr sz="1400" b="1" dirty="0" err="1">
                 <a:solidFill>
                   <a:srgbClr val="555F70"/>
                 </a:solidFill>
@@ -3542,7 +3551,7 @@
               <a:t>Stampfli</a:t>
             </a:r>
             <a:r>
-              <a:rPr lang="fr-CH" sz="1200" b="0" dirty="0">
+              <a:rPr lang="fr-CH" sz="1400" b="1" dirty="0">
                 <a:solidFill>
                   <a:srgbClr val="555F70"/>
                 </a:solidFill>
@@ -3551,7 +3560,7 @@
               <a:t>, Victor Giordani, Abram </a:t>
             </a:r>
             <a:r>
-              <a:rPr lang="fr-CH" sz="1200" b="0" dirty="0" err="1">
+              <a:rPr lang="fr-CH" sz="1400" b="1" dirty="0" err="1">
                 <a:solidFill>
                   <a:srgbClr val="555F70"/>
                 </a:solidFill>
@@ -3559,7 +3568,7 @@
               </a:rPr>
               <a:t>Zweifel</a:t>
             </a:r>
-            <a:endParaRPr sz="1200" b="0" dirty="0">
+            <a:endParaRPr sz="1400" b="1" dirty="0">
               <a:solidFill>
                 <a:srgbClr val="555F70"/>
               </a:solidFill>
@@ -3570,14 +3579,14 @@
       </p:sp>
       <p:sp>
         <p:nvSpPr>
-          <p:cNvPr id="17" name="TextBox 16"/>
+          <p:cNvPr id="19" name="TextBox 18"/>
           <p:cNvSpPr txBox="1"/>
           <p:nvPr/>
         </p:nvSpPr>
         <p:spPr>
           <a:xfrm>
-            <a:off x="10195560" y="914400"/>
-            <a:ext cx="1572768" cy="640080"/>
+            <a:off x="10634472" y="2942082"/>
+            <a:ext cx="685800" cy="164592"/>
           </a:xfrm>
           <a:prstGeom prst="rect">
             <a:avLst/>
@@ -3592,87 +3601,6 @@
           <a:p>
             <a:pPr algn="ctr"/>
             <a:r>
-              <a:rPr sz="2200" b="1" dirty="0">
-                <a:solidFill>
-                  <a:srgbClr val="FFFFFF"/>
-                </a:solidFill>
-                <a:latin typeface="Aptos"/>
-              </a:rPr>
-              <a:t>Logs
-Search
-Analytics</a:t>
-            </a:r>
-          </a:p>
-        </p:txBody>
-      </p:sp>
-      <p:sp>
-        <p:nvSpPr>
-          <p:cNvPr id="18" name="Oval 17"/>
-          <p:cNvSpPr/>
-          <p:nvPr/>
-        </p:nvSpPr>
-        <p:spPr>
-          <a:xfrm>
-            <a:off x="10634472" y="2743200"/>
-            <a:ext cx="685800" cy="685800"/>
-          </a:xfrm>
-          <a:prstGeom prst="ellipse">
-            <a:avLst/>
-          </a:prstGeom>
-          <a:solidFill>
-            <a:srgbClr val="FF9900"/>
-          </a:solidFill>
-          <a:ln>
-            <a:noFill/>
-          </a:ln>
-        </p:spPr>
-        <p:style>
-          <a:lnRef idx="1">
-            <a:schemeClr val="accent1"/>
-          </a:lnRef>
-          <a:fillRef idx="3">
-            <a:schemeClr val="accent1"/>
-          </a:fillRef>
-          <a:effectRef idx="2">
-            <a:schemeClr val="accent1"/>
-          </a:effectRef>
-          <a:fontRef idx="minor">
-            <a:schemeClr val="lt1"/>
-          </a:fontRef>
-        </p:style>
-        <p:txBody>
-          <a:bodyPr rtlCol="0" anchor="ctr"/>
-          <a:lstStyle/>
-          <a:p>
-            <a:pPr algn="ctr"/>
-            <a:endParaRPr/>
-          </a:p>
-        </p:txBody>
-      </p:sp>
-      <p:sp>
-        <p:nvSpPr>
-          <p:cNvPr id="19" name="TextBox 18"/>
-          <p:cNvSpPr txBox="1"/>
-          <p:nvPr/>
-        </p:nvSpPr>
-        <p:spPr>
-          <a:xfrm>
-            <a:off x="10634472" y="2942082"/>
-            <a:ext cx="685800" cy="164592"/>
-          </a:xfrm>
-          <a:prstGeom prst="rect">
-            <a:avLst/>
-          </a:prstGeom>
-          <a:noFill/>
-        </p:spPr>
-        <p:txBody>
-          <a:bodyPr wrap="square" lIns="18288" tIns="18288" rIns="18288" bIns="18288" anchor="t">
-            <a:spAutoFit/>
-          </a:bodyPr>
-          <a:lstStyle/>
-          <a:p>
-            <a:pPr algn="ctr"/>
-            <a:r>
               <a:rPr sz="1300" b="1">
                 <a:solidFill>
                   <a:srgbClr val="26245B"/>
@@ -3680,42 +3608,6 @@
                 <a:latin typeface="Aptos"/>
               </a:rPr>
               <a:t>OS</a:t>
-            </a:r>
-          </a:p>
-        </p:txBody>
-      </p:sp>
-      <p:sp>
-        <p:nvSpPr>
-          <p:cNvPr id="20" name="TextBox 19"/>
-          <p:cNvSpPr txBox="1"/>
-          <p:nvPr/>
-        </p:nvSpPr>
-        <p:spPr>
-          <a:xfrm>
-            <a:off x="10149840" y="3657600"/>
-            <a:ext cx="1691640" cy="420624"/>
-          </a:xfrm>
-          <a:prstGeom prst="rect">
-            <a:avLst/>
-          </a:prstGeom>
-          <a:noFill/>
-        </p:spPr>
-        <p:txBody>
-          <a:bodyPr wrap="square" lIns="18288" tIns="18288" rIns="18288" bIns="18288" anchor="t">
-            <a:spAutoFit/>
-          </a:bodyPr>
-          <a:lstStyle/>
-          <a:p>
-            <a:pPr algn="ctr"/>
-            <a:r>
-              <a:rPr sz="1200" b="0">
-                <a:solidFill>
-                  <a:srgbClr val="D5DAED"/>
-                </a:solidFill>
-                <a:latin typeface="Aptos"/>
-              </a:rPr>
-              <a:t>OpenSearch
-Dashboards</a:t>
             </a:r>
           </a:p>
         </p:txBody>
